--- a/Topic_C/Exam_Practice/TC-L07_Writing_Workshop_Documents_Texts_Digital_Information.pptx
+++ b/Topic_C/Exam_Practice/TC-L07_Writing_Workshop_Documents_Texts_Digital_Information.pptx
@@ -784,7 +784,11 @@
           <a:lstStyle/>
           <a:p>
             <a:r>
-              <a:rPr lang="en-US" dirty="0"/>
+              <a:rPr lang="ar-SA" dirty="0">
+                <a:latin typeface="Amiri" pitchFamily="2" charset="-78"/>
+                <a:ea typeface="Amiri" pitchFamily="2" charset="-78"/>
+                <a:cs typeface="Amiri" pitchFamily="2" charset="-78"/>
+              </a:rPr>
               <a:t>Q3 (3 min to choose and read). Title (أ) suits Core and Develop; title (ب) suits Stretch.</a:t>
             </a:r>
             <a:endParaRPr lang="en-US" dirty="0"/>
@@ -1403,7 +1407,11 @@
           <a:lstStyle/>
           <a:p>
             <a:r>
-              <a:rPr lang="en-US" dirty="0"/>
+              <a:rPr lang="ar-SA" dirty="0">
+                <a:latin typeface="Amiri" pitchFamily="2" charset="-78"/>
+                <a:ea typeface="Amiri" pitchFamily="2" charset="-78"/>
+                <a:cs typeface="Amiri" pitchFamily="2" charset="-78"/>
+              </a:rPr>
               <a:t>WELCOME (1 min) — while students join.
 • Greet each student by name as they arrive: السَّلَامُ عَلَيْكُمْ. Take the register (Pastoral Tracker: attendance 0/1).
 • 2-MINUTE CHECK-IN (SEND training): a private chat to any student who seemed unsettled last lesson — “Are you okay today? 👍 / 👎”.
@@ -1936,7 +1944,11 @@
           <a:lstStyle/>
           <a:p>
             <a:r>
-              <a:rPr lang="en-US" dirty="0"/>
+              <a:rPr lang="ar-SA" dirty="0">
+                <a:latin typeface="Amiri" pitchFamily="2" charset="-78"/>
+                <a:ea typeface="Amiri" pitchFamily="2" charset="-78"/>
+                <a:cs typeface="Amiri" pitchFamily="2" charset="-78"/>
+              </a:rPr>
               <a:t>Question words: مَنْ (who) · كَمْ (how many) · أَيُّ (which) · لِمَاذَا (why) · اسْأَلْ (ask!) — bullet 3 can be PAST; bullet 4 needs two QUESTIONS.</a:t>
             </a:r>
             <a:endParaRPr lang="en-US" dirty="0"/>
@@ -2508,6 +2520,7 @@
                   <a:srgbClr val="D4AF37"/>
                 </a:solidFill>
                 <a:latin typeface="Amiri" pitchFamily="2" charset="-78"/>
+                <a:ea typeface="Amiri" pitchFamily="2" charset="-78"/>
                 <a:cs typeface="Amiri" pitchFamily="2" charset="-78"/>
               </a:rPr>
               <a:t>م</a:t>
@@ -2714,6 +2727,7 @@
                   <a:srgbClr val="D4AF37"/>
                 </a:solidFill>
                 <a:latin typeface="Amiri" pitchFamily="2" charset="-78"/>
+                <a:ea typeface="Amiri" pitchFamily="2" charset="-78"/>
                 <a:cs typeface="Amiri" pitchFamily="2" charset="-78"/>
               </a:rPr>
               <a:t>وَرْشَةُ الكِتَابَةِ — الوَثَائِقُ وَالمَعْلُومَاتُ</a:t>
@@ -3171,6 +3185,7 @@
                   <a:srgbClr val="D4AF37"/>
                 </a:solidFill>
                 <a:latin typeface="Amiri" pitchFamily="2" charset="-78"/>
+                <a:ea typeface="Amiri" pitchFamily="2" charset="-78"/>
                 <a:cs typeface="Amiri" pitchFamily="2" charset="-78"/>
               </a:rPr>
               <a:t>م</a:t>
@@ -3491,6 +3506,7 @@
                   <a:srgbClr val="8A6D1E"/>
                 </a:solidFill>
                 <a:latin typeface="Amiri" pitchFamily="2" charset="-78"/>
+                <a:ea typeface="Amiri" pitchFamily="2" charset="-78"/>
                 <a:cs typeface="Amiri" pitchFamily="2" charset="-78"/>
               </a:rPr>
               <a:t>نَمُوذَجُ الإِجَابَةِ</a:t>
@@ -3604,6 +3620,7 @@
                   <a:srgbClr val="1F2A37"/>
                 </a:solidFill>
                 <a:latin typeface="Amiri" pitchFamily="2" charset="-78"/>
+                <a:ea typeface="Amiri" pitchFamily="2" charset="-78"/>
                 <a:cs typeface="Amiri" pitchFamily="2" charset="-78"/>
               </a:rPr>
               <a:t>السَّلَامُ عَلَيْكُمْ،</a:t>
@@ -3623,6 +3640,7 @@
                   <a:srgbClr val="1F2A37"/>
                 </a:solidFill>
                 <a:latin typeface="Amiri" pitchFamily="2" charset="-78"/>
+                <a:ea typeface="Amiri" pitchFamily="2" charset="-78"/>
                 <a:cs typeface="Amiri" pitchFamily="2" charset="-78"/>
               </a:rPr>
               <a:t>أُرِيدُ أَنْ أَحْجِزَ غُرْفَةً فِي فُنْدُقِكُمْ لِي وَلِأُسْرَتِي. نَحْنُ أَرْبَعَةُ أَشْخَاصٍ: أَنَا وَأَبِي وَأُمِّي وَأَخِي الصَّغِيرُ. سَنَصِلُ يَوْمَ السَّبْتِ العَاشِرِ مِنْ يُولْيُو، وَسَنُقِيمُ خَمْسَ لَيَالٍ. نُرِيدُ غُرْفَتَيْنِ مُطِلَّتَيْنِ عَلَى البَحْرِ، مَعَ الفُطُورِ. فِي السَّنَةِ المَاضِيَةِ أَقَمْنَا فِي فُنْدُقِكُمْ، وَكَانَتِ الخِدْمَةُ مُمْتَازَةً. هَلْ عِنْدَكُمْ مَوْقِفٌ لِلسَّيَّارَاتِ؟ وَكَمْ سِعْرُ اللَّيْلَةِ؟ أَرْجُو أَنْ تُرْسِلُوا التَّأْكِيدَ إِلَى بَرِيدِي الإِلِكْتْرُونِيِّ.</a:t>
@@ -3642,6 +3660,7 @@
                   <a:srgbClr val="1F2A37"/>
                 </a:solidFill>
                 <a:latin typeface="Amiri" pitchFamily="2" charset="-78"/>
+                <a:ea typeface="Amiri" pitchFamily="2" charset="-78"/>
                 <a:cs typeface="Amiri" pitchFamily="2" charset="-78"/>
               </a:rPr>
               <a:t>مَعَ الشُّكْرِ،</a:t>
@@ -3661,6 +3680,7 @@
                   <a:srgbClr val="1F2A37"/>
                 </a:solidFill>
                 <a:latin typeface="Amiri" pitchFamily="2" charset="-78"/>
+                <a:ea typeface="Amiri" pitchFamily="2" charset="-78"/>
                 <a:cs typeface="Amiri" pitchFamily="2" charset="-78"/>
               </a:rPr>
               <a:t>يُوسُفُ أَحْمَدُ</a:t>
@@ -3824,11 +3844,12 @@
               <a:buNone/>
             </a:pPr>
             <a:r>
-              <a:rPr lang="en-US" sz="950" b="1" dirty="0">
+              <a:rPr lang="ar-SA" sz="950" b="1" dirty="0">
                 <a:solidFill>
                   <a:srgbClr val="FFFFFF"/>
                 </a:solidFill>
                 <a:latin typeface="Calibri" pitchFamily="34" charset="0"/>
+                <a:ea typeface="Amiri" pitchFamily="2" charset="-78"/>
                 <a:cs typeface="Amiri" pitchFamily="2" charset="-78"/>
               </a:rPr>
               <a:t>أُرِيدُ أَنْ أَحْجِزَ</a:t>
@@ -3889,11 +3910,12 @@
               <a:buNone/>
             </a:pPr>
             <a:r>
-              <a:rPr lang="en-US" sz="950" b="1" dirty="0">
+              <a:rPr lang="ar-SA" sz="950" b="1" dirty="0">
                 <a:solidFill>
                   <a:srgbClr val="FFFFFF"/>
                 </a:solidFill>
                 <a:latin typeface="Calibri" pitchFamily="34" charset="0"/>
+                <a:ea typeface="Amiri" pitchFamily="2" charset="-78"/>
                 <a:cs typeface="Amiri" pitchFamily="2" charset="-78"/>
               </a:rPr>
               <a:t>سَنُقِيمُ خَمْسَ لَيَالٍ</a:t>
@@ -3954,11 +3976,12 @@
               <a:buNone/>
             </a:pPr>
             <a:r>
-              <a:rPr lang="en-US" sz="950" b="1" dirty="0">
+              <a:rPr lang="ar-SA" sz="950" b="1" dirty="0">
                 <a:solidFill>
                   <a:srgbClr val="FFFFFF"/>
                 </a:solidFill>
                 <a:latin typeface="Calibri" pitchFamily="34" charset="0"/>
+                <a:ea typeface="Amiri" pitchFamily="2" charset="-78"/>
                 <a:cs typeface="Amiri" pitchFamily="2" charset="-78"/>
               </a:rPr>
               <a:t>أَقَمْنَا فِي فُنْدُقِكُمْ</a:t>
@@ -4019,11 +4042,12 @@
               <a:buNone/>
             </a:pPr>
             <a:r>
-              <a:rPr lang="en-US" sz="950" b="1" dirty="0">
+              <a:rPr lang="ar-SA" sz="950" b="1" dirty="0">
                 <a:solidFill>
                   <a:srgbClr val="FFFFFF"/>
                 </a:solidFill>
                 <a:latin typeface="Calibri" pitchFamily="34" charset="0"/>
+                <a:ea typeface="Amiri" pitchFamily="2" charset="-78"/>
                 <a:cs typeface="Amiri" pitchFamily="2" charset="-78"/>
               </a:rPr>
               <a:t>هَلْ عِنْدَكُمْ</a:t>
@@ -4157,6 +4181,7 @@
                   <a:srgbClr val="D4AF37"/>
                 </a:solidFill>
                 <a:latin typeface="Amiri" pitchFamily="2" charset="-78"/>
+                <a:ea typeface="Amiri" pitchFamily="2" charset="-78"/>
                 <a:cs typeface="Amiri" pitchFamily="2" charset="-78"/>
               </a:rPr>
               <a:t>م</a:t>
@@ -4477,6 +4502,7 @@
                   <a:srgbClr val="8A6D1E"/>
                 </a:solidFill>
                 <a:latin typeface="Amiri" pitchFamily="2" charset="-78"/>
+                <a:ea typeface="Amiri" pitchFamily="2" charset="-78"/>
                 <a:cs typeface="Amiri" pitchFamily="2" charset="-78"/>
               </a:rPr>
               <a:t>نَمُوذَجُ الإِجَابَةِ</a:t>
@@ -4590,6 +4616,7 @@
                   <a:srgbClr val="1F2A37"/>
                 </a:solidFill>
                 <a:latin typeface="Amiri" pitchFamily="2" charset="-78"/>
+                <a:ea typeface="Amiri" pitchFamily="2" charset="-78"/>
                 <a:cs typeface="Amiri" pitchFamily="2" charset="-78"/>
               </a:rPr>
               <a:t>حَضْرَةَ مُدِيرِ فُنْدُقِ النَّخِيلِ المُحْتَرَمِ،</a:t>
@@ -4609,6 +4636,7 @@
                   <a:srgbClr val="1F2A37"/>
                 </a:solidFill>
                 <a:latin typeface="Amiri" pitchFamily="2" charset="-78"/>
+                <a:ea typeface="Amiri" pitchFamily="2" charset="-78"/>
                 <a:cs typeface="Amiri" pitchFamily="2" charset="-78"/>
               </a:rPr>
               <a:t>تَحِيَّةً طَيِّبَةً، وَبَعْدُ، فَأَوَدُّ أَنْ أَحْجِزَ غُرْفَتَيْنِ لِأُسْرَتِي المُكَوَّنَةِ مِنْ أَرْبَعَةِ أَفْرَادٍ، مِنَ العَاشِرِ إِلَى الخَامِسَ عَشَرَ مِنْ يُولْيُو. وَنُفَضِّلُ الغُرَفَ الَّتِي تُطِلُّ عَلَى البَحْرِ، مَعَ وَجْبَةِ الفُطُورِ. وَقَدْ أَقَمْنَا عِنْدَكُمْ فِي الصَّيْفِ المَاضِي، وَأَعْجَبَتْنَا نَظَافَةُ الغُرَفِ وَلُطْفُ المُوَظَّفِينَ، لِذٰلِكَ لَمْ نُفَكِّرْ فِي فُنْدُقٍ آخَرَ. وَأَرْجُو أَنْ تُخْبِرُونِي بِسِعْرِ اللَّيْلَةِ، وَهَلْ تُوجَدُ خِدْمَةُ النَّقْلِ مِنَ المَطَارِ، لِأَنَّ طَائِرَتَنَا تَصِلُ فِي مُنْتَصَفِ اللَّيْلِ. وَبَعْدَ تَأْكِيدِ الحَجْزِ، سَأُرْسِلُ صُورَةً مِنْ جَوَازَاتِ السَّفَرِ كَمَا تَطْلُبُونَ.</a:t>
@@ -4628,6 +4656,7 @@
                   <a:srgbClr val="1F2A37"/>
                 </a:solidFill>
                 <a:latin typeface="Amiri" pitchFamily="2" charset="-78"/>
+                <a:ea typeface="Amiri" pitchFamily="2" charset="-78"/>
                 <a:cs typeface="Amiri" pitchFamily="2" charset="-78"/>
               </a:rPr>
               <a:t>وَتَفَضَّلُوا بِقَبُولِ فَائِقِ الاحْتِرَامِ،</a:t>
@@ -4647,6 +4676,7 @@
                   <a:srgbClr val="1F2A37"/>
                 </a:solidFill>
                 <a:latin typeface="Amiri" pitchFamily="2" charset="-78"/>
+                <a:ea typeface="Amiri" pitchFamily="2" charset="-78"/>
                 <a:cs typeface="Amiri" pitchFamily="2" charset="-78"/>
               </a:rPr>
               <a:t>يُوسُفُ أَحْمَدُ</a:t>
@@ -4810,11 +4840,12 @@
               <a:buNone/>
             </a:pPr>
             <a:r>
-              <a:rPr lang="en-US" sz="950" b="1" dirty="0">
+              <a:rPr lang="ar-SA" sz="950" b="1" dirty="0">
                 <a:solidFill>
                   <a:srgbClr val="FFFFFF"/>
                 </a:solidFill>
                 <a:latin typeface="Calibri" pitchFamily="34" charset="0"/>
+                <a:ea typeface="Amiri" pitchFamily="2" charset="-78"/>
                 <a:cs typeface="Amiri" pitchFamily="2" charset="-78"/>
               </a:rPr>
               <a:t>أَوَدُّ أَنْ أَحْجِزَ</a:t>
@@ -4875,11 +4906,12 @@
               <a:buNone/>
             </a:pPr>
             <a:r>
-              <a:rPr lang="en-US" sz="950" b="1" dirty="0">
+              <a:rPr lang="ar-SA" sz="950" b="1" dirty="0">
                 <a:solidFill>
                   <a:srgbClr val="FFFFFF"/>
                 </a:solidFill>
                 <a:latin typeface="Calibri" pitchFamily="34" charset="0"/>
+                <a:ea typeface="Amiri" pitchFamily="2" charset="-78"/>
                 <a:cs typeface="Amiri" pitchFamily="2" charset="-78"/>
               </a:rPr>
               <a:t>الغُرَفَ الَّتِي تُطِلُّ</a:t>
@@ -4940,11 +4972,12 @@
               <a:buNone/>
             </a:pPr>
             <a:r>
-              <a:rPr lang="en-US" sz="950" b="1" dirty="0">
+              <a:rPr lang="ar-SA" sz="950" b="1" dirty="0">
                 <a:solidFill>
                   <a:srgbClr val="FFFFFF"/>
                 </a:solidFill>
                 <a:latin typeface="Calibri" pitchFamily="34" charset="0"/>
+                <a:ea typeface="Amiri" pitchFamily="2" charset="-78"/>
                 <a:cs typeface="Amiri" pitchFamily="2" charset="-78"/>
               </a:rPr>
               <a:t>أَعْجَبَتْنَا نَظَافَةُ</a:t>
@@ -5005,11 +5038,12 @@
               <a:buNone/>
             </a:pPr>
             <a:r>
-              <a:rPr lang="en-US" sz="950" b="1" dirty="0">
+              <a:rPr lang="ar-SA" sz="950" b="1" dirty="0">
                 <a:solidFill>
                   <a:srgbClr val="FFFFFF"/>
                 </a:solidFill>
                 <a:latin typeface="Calibri" pitchFamily="34" charset="0"/>
+                <a:ea typeface="Amiri" pitchFamily="2" charset="-78"/>
                 <a:cs typeface="Amiri" pitchFamily="2" charset="-78"/>
               </a:rPr>
               <a:t>بَعْدَ تَأْكِيدِ الحَجْزِ، سَأُرْسِلُ</a:t>
@@ -5143,6 +5177,7 @@
                   <a:srgbClr val="D4AF37"/>
                 </a:solidFill>
                 <a:latin typeface="Amiri" pitchFamily="2" charset="-78"/>
+                <a:ea typeface="Amiri" pitchFamily="2" charset="-78"/>
                 <a:cs typeface="Amiri" pitchFamily="2" charset="-78"/>
               </a:rPr>
               <a:t>م</a:t>
@@ -5463,6 +5498,7 @@
                   <a:srgbClr val="8A6D1E"/>
                 </a:solidFill>
                 <a:latin typeface="Amiri" pitchFamily="2" charset="-78"/>
+                <a:ea typeface="Amiri" pitchFamily="2" charset="-78"/>
                 <a:cs typeface="Amiri" pitchFamily="2" charset="-78"/>
               </a:rPr>
               <a:t>اخْتَرْ عُنْوَانًا وَاحِدًا</a:t>
@@ -5743,6 +5779,7 @@
                   <a:srgbClr val="1B3B6F"/>
                 </a:solidFill>
                 <a:latin typeface="Amiri" pitchFamily="2" charset="-78"/>
+                <a:ea typeface="Amiri" pitchFamily="2" charset="-78"/>
                 <a:cs typeface="Amiri" pitchFamily="2" charset="-78"/>
               </a:rPr>
               <a:t>رِحْلَةٌ نَظَّمْتُهَا بِنَفْسِي</a:t>
@@ -5781,6 +5818,7 @@
                   <a:srgbClr val="1B3B6F"/>
                 </a:solidFill>
                 <a:latin typeface="Amiri" pitchFamily="2" charset="-78"/>
+                <a:ea typeface="Amiri" pitchFamily="2" charset="-78"/>
                 <a:cs typeface="Amiri" pitchFamily="2" charset="-78"/>
               </a:rPr>
               <a:t>(أ)</a:t>
@@ -5887,6 +5925,7 @@
                   <a:srgbClr val="1B3B6F"/>
                 </a:solidFill>
                 <a:latin typeface="Amiri" pitchFamily="2" charset="-78"/>
+                <a:ea typeface="Amiri" pitchFamily="2" charset="-78"/>
                 <a:cs typeface="Amiri" pitchFamily="2" charset="-78"/>
               </a:rPr>
               <a:t>الحَجْزُ قَبْلَ السَّفَرِ · الوَثَائِقُ وَالإِجْرَاءَاتُ · مُشْكِلَةٌ حَدَثَتْ وَكَيْفَ حُلَّتْ · رَأْيُكَ وَخِطَطُكَ</a:t>
@@ -6018,6 +6057,7 @@
                   <a:srgbClr val="1B3B6F"/>
                 </a:solidFill>
                 <a:latin typeface="Amiri" pitchFamily="2" charset="-78"/>
+                <a:ea typeface="Amiri" pitchFamily="2" charset="-78"/>
                 <a:cs typeface="Amiri" pitchFamily="2" charset="-78"/>
               </a:rPr>
               <a:t>الوَثَائِقُ الرَّقْمِيَّةُ: سُهُولَةٌ أَمْ خَطَرٌ؟</a:t>
@@ -6056,6 +6096,7 @@
                   <a:srgbClr val="1B3B6F"/>
                 </a:solidFill>
                 <a:latin typeface="Amiri" pitchFamily="2" charset="-78"/>
+                <a:ea typeface="Amiri" pitchFamily="2" charset="-78"/>
                 <a:cs typeface="Amiri" pitchFamily="2" charset="-78"/>
               </a:rPr>
               <a:t>(ب)</a:t>
@@ -6159,6 +6200,7 @@
                   <a:srgbClr val="1B3B6F"/>
                 </a:solidFill>
                 <a:latin typeface="Amiri" pitchFamily="2" charset="-78"/>
+                <a:ea typeface="Amiri" pitchFamily="2" charset="-78"/>
                 <a:cs typeface="Amiri" pitchFamily="2" charset="-78"/>
               </a:rPr>
               <a:t>التَّحَوُّلُ إِلَى الرَّقْمِيِّ · المَاضِي وَالحَاضِرُ · مِثَالٌ مِنَ الوَاقِعِ · رَأْيُكَ وَنَصِيحَتُكَ</a:t>
@@ -6358,6 +6400,7 @@
                   <a:srgbClr val="D4AF37"/>
                 </a:solidFill>
                 <a:latin typeface="Amiri" pitchFamily="2" charset="-78"/>
+                <a:ea typeface="Amiri" pitchFamily="2" charset="-78"/>
                 <a:cs typeface="Amiri" pitchFamily="2" charset="-78"/>
               </a:rPr>
               <a:t>م</a:t>
@@ -6678,6 +6721,7 @@
                   <a:srgbClr val="8A6D1E"/>
                 </a:solidFill>
                 <a:latin typeface="Amiri" pitchFamily="2" charset="-78"/>
+                <a:ea typeface="Amiri" pitchFamily="2" charset="-78"/>
                 <a:cs typeface="Amiri" pitchFamily="2" charset="-78"/>
               </a:rPr>
               <a:t>خُطَّةُ الكِتَابَةِ</a:t>
@@ -7302,6 +7346,7 @@
                   <a:srgbClr val="1B3B6F"/>
                 </a:solidFill>
                 <a:latin typeface="Amiri" pitchFamily="2" charset="-78"/>
+                <a:ea typeface="Amiri" pitchFamily="2" charset="-78"/>
                 <a:cs typeface="Amiri" pitchFamily="2" charset="-78"/>
               </a:rPr>
               <a:t>أُفَضِّلُ الحَجْزَ عَلَى الإِنْتَرْنِتِ، لِأَنَّهُ أَسْرَعُ.</a:t>
@@ -7401,6 +7446,7 @@
                   <a:srgbClr val="1B3B6F"/>
                 </a:solidFill>
                 <a:latin typeface="Amiri" pitchFamily="2" charset="-78"/>
+                <a:ea typeface="Amiri" pitchFamily="2" charset="-78"/>
                 <a:cs typeface="Amiri" pitchFamily="2" charset="-78"/>
               </a:rPr>
               <a:t>حَجَزْنَا شَقَّةً، وَأُرْسِلَ التَّأْكِيدُ إِلَى هَاتِفِ أَبِي.</a:t>
@@ -7500,6 +7546,7 @@
                   <a:srgbClr val="1B3B6F"/>
                 </a:solidFill>
                 <a:latin typeface="Amiri" pitchFamily="2" charset="-78"/>
+                <a:ea typeface="Amiri" pitchFamily="2" charset="-78"/>
                 <a:cs typeface="Amiri" pitchFamily="2" charset="-78"/>
               </a:rPr>
               <a:t>سَأَحْجِزُ أَنَا الرِّحْلَةَ فِي الصَّيْفِ القَادِمِ.</a:t>
@@ -7661,6 +7708,7 @@
                   <a:srgbClr val="1F2A37"/>
                 </a:solidFill>
                 <a:latin typeface="Amiri" pitchFamily="2" charset="-78"/>
+                <a:ea typeface="Amiri" pitchFamily="2" charset="-78"/>
                 <a:cs typeface="Amiri" pitchFamily="2" charset="-78"/>
               </a:rPr>
               <a:t>أ</a:t>
@@ -7687,6 +7735,7 @@
                   <a:srgbClr val="1F2A37"/>
                 </a:solidFill>
                 <a:latin typeface="Amiri" pitchFamily="2" charset="-78"/>
+                <a:ea typeface="Amiri" pitchFamily="2" charset="-78"/>
                 <a:cs typeface="Amiri" pitchFamily="2" charset="-78"/>
               </a:rPr>
               <a:t>ب</a:t>
@@ -7833,6 +7882,7 @@
                   <a:srgbClr val="D4AF37"/>
                 </a:solidFill>
                 <a:latin typeface="Amiri" pitchFamily="2" charset="-78"/>
+                <a:ea typeface="Amiri" pitchFamily="2" charset="-78"/>
                 <a:cs typeface="Amiri" pitchFamily="2" charset="-78"/>
               </a:rPr>
               <a:t>م</a:t>
@@ -8090,6 +8140,7 @@
                   <a:srgbClr val="8A6D1E"/>
                 </a:solidFill>
                 <a:latin typeface="Amiri" pitchFamily="2" charset="-78"/>
+                <a:ea typeface="Amiri" pitchFamily="2" charset="-78"/>
                 <a:cs typeface="Amiri" pitchFamily="2" charset="-78"/>
               </a:rPr>
               <a:t>أ</a:t>
@@ -8154,6 +8205,7 @@
                   <a:srgbClr val="1B3B6F"/>
                 </a:solidFill>
                 <a:latin typeface="Amiri" pitchFamily="2" charset="-78"/>
+                <a:ea typeface="Amiri" pitchFamily="2" charset="-78"/>
                 <a:cs typeface="Amiri" pitchFamily="2" charset="-78"/>
               </a:rPr>
               <a:t>أ</a:t>
@@ -8205,6 +8257,7 @@
                   <a:srgbClr val="8A6D1E"/>
                 </a:solidFill>
                 <a:latin typeface="Amiri" pitchFamily="2" charset="-78"/>
+                <a:ea typeface="Amiri" pitchFamily="2" charset="-78"/>
                 <a:cs typeface="Amiri" pitchFamily="2" charset="-78"/>
               </a:rPr>
               <a:t>نَمُوذَجُ الإِجَابَةِ</a:t>
@@ -8318,6 +8371,7 @@
                   <a:srgbClr val="1F2A37"/>
                 </a:solidFill>
                 <a:latin typeface="Amiri" pitchFamily="2" charset="-78"/>
+                <a:ea typeface="Amiri" pitchFamily="2" charset="-78"/>
                 <a:cs typeface="Amiri" pitchFamily="2" charset="-78"/>
               </a:rPr>
               <a:t>فِي الصَّيْفِ المَاضِي سَافَرْتُ مَعَ أُسْرَتِي إِلَى المَغْرِبِ. قَبْلَ السَّفَرِ حَجَزْنَا تَذَاكِرَ الطَّائِرَةِ عَلَى الإِنْتَرْنِتِ، وَحَجَزْنَا شَقَّةً جَمِيلَةً فِي مَرَّاكُشَ. كَانَ الحَجْزُ سَهْلًا وَسَرِيعًا، وَأُرْسِلَ التَّأْكِيدُ إِلَى هَاتِفِ أَبِي.</a:t>
@@ -8337,6 +8391,7 @@
                   <a:srgbClr val="1F2A37"/>
                 </a:solidFill>
                 <a:latin typeface="Amiri" pitchFamily="2" charset="-78"/>
+                <a:ea typeface="Amiri" pitchFamily="2" charset="-78"/>
                 <a:cs typeface="Amiri" pitchFamily="2" charset="-78"/>
               </a:rPr>
               <a:t>فِي المَطَارِ أَظْهَرْنَا جَوَازَاتِ السَّفَرِ وَالتَّذَاكِرَ الإِلِكْتْرُونِيَّةَ. ثُمَّ رَكِبْنَا الطَّائِرَةَ، وَوَصَلْنَا بَعْدَ ثَلَاثِ سَاعَاتٍ. أَقَمْنَا فِي الشَّقَّةِ أُسْبُوعًا كَامِلًا. كَانَتْ نَظِيفَةً وَقَرِيبَةً مِنَ السُّوقِ القَدِيمِ، وَكَانَ صَاحِبُهَا لَطِيفًا جِدًّا.</a:t>
@@ -8356,6 +8411,7 @@
                   <a:srgbClr val="1F2A37"/>
                 </a:solidFill>
                 <a:latin typeface="Amiri" pitchFamily="2" charset="-78"/>
+                <a:ea typeface="Amiri" pitchFamily="2" charset="-78"/>
                 <a:cs typeface="Amiri" pitchFamily="2" charset="-78"/>
               </a:rPr>
               <a:t>لٰكِنْ حَدَثَتْ مُشْكِلَةٌ صَغِيرَةٌ: نَسِيَ أَخِي جَوَازَ سَفَرِهِ فِي الشَّقَّةِ يَوْمَ الرُّجُوعِ! رَجَعَ أَبِي بِسُرْعَةٍ بِسَيَّارَةِ أُجْرَةٍ، وَوَصَلْنَا إِلَى المَطَارِ فِي آخِرِ دَقِيقَةٍ.</a:t>
@@ -8375,6 +8431,7 @@
                   <a:srgbClr val="1F2A37"/>
                 </a:solidFill>
                 <a:latin typeface="Amiri" pitchFamily="2" charset="-78"/>
+                <a:ea typeface="Amiri" pitchFamily="2" charset="-78"/>
                 <a:cs typeface="Amiri" pitchFamily="2" charset="-78"/>
               </a:rPr>
               <a:t>فِي رَأْيِي، الحَجْزُ عَلَى الإِنْتَرْنِتِ مُفِيدٌ جِدًّا، لِأَنَّهُ أَرْخَصُ وَأَسْرَعُ. لٰكِنْ يَجِبُ أَنْ نَحْفَظَ الوَثَائِقَ فِي مَكَانٍ آمِنٍ. فِي الصَّيْفِ القَادِمِ سَأَحْجِزُ أَنَا الرِّحْلَةَ إِلَى إِسْبَانْيَا، وَسَأَصْنَعُ قَائِمَةً بِكُلِّ الوَثَائِقِ.</a:t>
@@ -8538,11 +8595,12 @@
               <a:buNone/>
             </a:pPr>
             <a:r>
-              <a:rPr lang="en-US" sz="950" b="1" dirty="0">
+              <a:rPr lang="ar-SA" sz="950" b="1" dirty="0">
                 <a:solidFill>
                   <a:srgbClr val="FFFFFF"/>
                 </a:solidFill>
                 <a:latin typeface="Calibri" pitchFamily="34" charset="0"/>
+                <a:ea typeface="Amiri" pitchFamily="2" charset="-78"/>
                 <a:cs typeface="Amiri" pitchFamily="2" charset="-78"/>
               </a:rPr>
               <a:t>حَجَزْنَا تَذَاكِرَ</a:t>
@@ -8603,11 +8661,12 @@
               <a:buNone/>
             </a:pPr>
             <a:r>
-              <a:rPr lang="en-US" sz="950" b="1" dirty="0">
+              <a:rPr lang="ar-SA" sz="950" b="1" dirty="0">
                 <a:solidFill>
                   <a:srgbClr val="FFFFFF"/>
                 </a:solidFill>
                 <a:latin typeface="Calibri" pitchFamily="34" charset="0"/>
+                <a:ea typeface="Amiri" pitchFamily="2" charset="-78"/>
                 <a:cs typeface="Amiri" pitchFamily="2" charset="-78"/>
               </a:rPr>
               <a:t>أُرْسِلَ التَّأْكِيدُ</a:t>
@@ -8668,11 +8727,12 @@
               <a:buNone/>
             </a:pPr>
             <a:r>
-              <a:rPr lang="en-US" sz="950" b="1" dirty="0">
+              <a:rPr lang="ar-SA" sz="950" b="1" dirty="0">
                 <a:solidFill>
                   <a:srgbClr val="FFFFFF"/>
                 </a:solidFill>
                 <a:latin typeface="Calibri" pitchFamily="34" charset="0"/>
+                <a:ea typeface="Amiri" pitchFamily="2" charset="-78"/>
                 <a:cs typeface="Amiri" pitchFamily="2" charset="-78"/>
               </a:rPr>
               <a:t>أَقَمْنَا فِي الشَّقَّةِ</a:t>
@@ -8733,11 +8793,12 @@
               <a:buNone/>
             </a:pPr>
             <a:r>
-              <a:rPr lang="en-US" sz="950" b="1" dirty="0">
+              <a:rPr lang="ar-SA" sz="950" b="1" dirty="0">
                 <a:solidFill>
                   <a:srgbClr val="FFFFFF"/>
                 </a:solidFill>
                 <a:latin typeface="Calibri" pitchFamily="34" charset="0"/>
+                <a:ea typeface="Amiri" pitchFamily="2" charset="-78"/>
                 <a:cs typeface="Amiri" pitchFamily="2" charset="-78"/>
               </a:rPr>
               <a:t>سَأَحْجِزُ أَنَا</a:t>
@@ -8871,6 +8932,7 @@
                   <a:srgbClr val="D4AF37"/>
                 </a:solidFill>
                 <a:latin typeface="Amiri" pitchFamily="2" charset="-78"/>
+                <a:ea typeface="Amiri" pitchFamily="2" charset="-78"/>
                 <a:cs typeface="Amiri" pitchFamily="2" charset="-78"/>
               </a:rPr>
               <a:t>م</a:t>
@@ -9128,6 +9190,7 @@
                   <a:srgbClr val="8A6D1E"/>
                 </a:solidFill>
                 <a:latin typeface="Amiri" pitchFamily="2" charset="-78"/>
+                <a:ea typeface="Amiri" pitchFamily="2" charset="-78"/>
                 <a:cs typeface="Amiri" pitchFamily="2" charset="-78"/>
               </a:rPr>
               <a:t>أ</a:t>
@@ -9192,6 +9255,7 @@
                   <a:srgbClr val="1B3B6F"/>
                 </a:solidFill>
                 <a:latin typeface="Amiri" pitchFamily="2" charset="-78"/>
+                <a:ea typeface="Amiri" pitchFamily="2" charset="-78"/>
                 <a:cs typeface="Amiri" pitchFamily="2" charset="-78"/>
               </a:rPr>
               <a:t>أ</a:t>
@@ -9243,6 +9307,7 @@
                   <a:srgbClr val="8A6D1E"/>
                 </a:solidFill>
                 <a:latin typeface="Amiri" pitchFamily="2" charset="-78"/>
+                <a:ea typeface="Amiri" pitchFamily="2" charset="-78"/>
                 <a:cs typeface="Amiri" pitchFamily="2" charset="-78"/>
               </a:rPr>
               <a:t>نَمُوذَجُ الإِجَابَةِ</a:t>
@@ -9356,6 +9421,7 @@
                   <a:srgbClr val="1F2A37"/>
                 </a:solidFill>
                 <a:latin typeface="Amiri" pitchFamily="2" charset="-78"/>
+                <a:ea typeface="Amiri" pitchFamily="2" charset="-78"/>
                 <a:cs typeface="Amiri" pitchFamily="2" charset="-78"/>
               </a:rPr>
               <a:t>يَظُنُّ كَثِيرُونَ أَنَّ السَّفَرَ يَبْدَأُ فِي المَطَارِ، لٰكِنِّي تَعَلَّمْتُ أَنَّ الرِّحْلَةَ الحَقِيقِيَّةَ تَبْدَأُ أَمَامَ شَاشَةِ الحَاسُوبِ؛ فَفِي الصَّيْفِ المَاضِي كُلِّفْتُ لِأَوَّلِ مَرَّةٍ بِتَنْظِيمِ رِحْلَةِ أُسْرَتِي إِلَى الأُرْدُنِّ كُلِّهَا.</a:t>
@@ -9375,6 +9441,7 @@
                   <a:srgbClr val="1F2A37"/>
                 </a:solidFill>
                 <a:latin typeface="Amiri" pitchFamily="2" charset="-78"/>
+                <a:ea typeface="Amiri" pitchFamily="2" charset="-78"/>
                 <a:cs typeface="Amiri" pitchFamily="2" charset="-78"/>
               </a:rPr>
               <a:t>قَارَنْتُ أَسْعَارَ الرِّحْلَاتِ عَلَى عِدَّةِ مَوَاقِعَ، ثُمَّ حَجَزْتُ تَذَاكِرَ ذَهَابٍ وَإِيَابٍ، وَشَقَّةً فِي عَمَّانَ قَرَأْتُ عَنْهَا عَشَرَاتِ التَّعْلِيقَاتِ الإِيجَابِيَّةِ. كَمَا مَلَأْتُ اسْتِمَارَةَ التَّأْشِيرَةِ الإِلِكْتْرُونِيَّةِ بِدِقَّةٍ، لِأَنَّ أَيَّ خَطَأٍ فِي الأَسْمَاءِ أَوِ الأَرْقَامِ قَدْ يُسَبِّبُ رَفْضَ الطَّلَبِ. وَبَعْدَ يَوْمَيْنِ، وَصَلَتْ إِلَى بَرِيدِي رِسَالَةٌ تُؤَكِّدُ أَنَّ الطَّلَبَ قُبِلَ.</a:t>
@@ -9394,6 +9461,7 @@
                   <a:srgbClr val="1F2A37"/>
                 </a:solidFill>
                 <a:latin typeface="Amiri" pitchFamily="2" charset="-78"/>
+                <a:ea typeface="Amiri" pitchFamily="2" charset="-78"/>
                 <a:cs typeface="Amiri" pitchFamily="2" charset="-78"/>
               </a:rPr>
               <a:t>غَيْرَ أَنَّ المُفَاجَأَةَ جَاءَتْ عِنْدَ الوُصُولِ؛ فَقَدِ اكْتَشَفْنَا أَنَّ صَاحِبَ الشَّقَّةِ أَلْغَى الحَجْزَ دُونَ أَنْ يُخْبِرَنَا! وَبَعْدَ سَاعَةٍ مِنَ القَلَقِ، تَوَاصَلْتُ مَعَ المَوْقِعِ الَّذِي حَجَزْنَا عَنْ طَرِيقِهِ، فَوَجَدُوا لَنَا فُنْدُقًا أَفْضَلَ بِالسِّعْرِ نَفْسِهِ.</a:t>
@@ -9413,6 +9481,7 @@
                   <a:srgbClr val="1F2A37"/>
                 </a:solidFill>
                 <a:latin typeface="Amiri" pitchFamily="2" charset="-78"/>
+                <a:ea typeface="Amiri" pitchFamily="2" charset="-78"/>
                 <a:cs typeface="Amiri" pitchFamily="2" charset="-78"/>
               </a:rPr>
               <a:t>صَحِيحٌ أَنَّ الحَجْزَ الإِلِكْتْرُونِيَّ سَهَّلَ حَيَاتَنَا، غَيْرَ أَنَّهُ يَحْتَاجُ إِلَى انْتِبَاهٍ وَصَبْرٍ. وَلَوْ لَمْ أَحْتَفِظْ بِرِسَالَةِ التَّأْكِيدِ عَلَى هَاتِفِي، لَبَقِينَا فِي الشَّارِعِ تِلْكَ اللَّيْلَةَ.</a:t>
@@ -9511,11 +9580,12 @@
               <a:buNone/>
             </a:pPr>
             <a:r>
-              <a:rPr lang="en-US" sz="950" b="1" dirty="0">
+              <a:rPr lang="ar-SA" sz="950" b="1" dirty="0">
                 <a:solidFill>
                   <a:srgbClr val="FFFFFF"/>
                 </a:solidFill>
                 <a:latin typeface="Calibri" pitchFamily="34" charset="0"/>
+                <a:ea typeface="Amiri" pitchFamily="2" charset="-78"/>
                 <a:cs typeface="Amiri" pitchFamily="2" charset="-78"/>
               </a:rPr>
               <a:t>كُلِّفْتُ لِأَوَّلِ مَرَّةٍ</a:t>
@@ -9576,11 +9646,12 @@
               <a:buNone/>
             </a:pPr>
             <a:r>
-              <a:rPr lang="en-US" sz="950" b="1" dirty="0">
+              <a:rPr lang="ar-SA" sz="950" b="1" dirty="0">
                 <a:solidFill>
                   <a:srgbClr val="FFFFFF"/>
                 </a:solidFill>
                 <a:latin typeface="Calibri" pitchFamily="34" charset="0"/>
+                <a:ea typeface="Amiri" pitchFamily="2" charset="-78"/>
                 <a:cs typeface="Amiri" pitchFamily="2" charset="-78"/>
               </a:rPr>
               <a:t>قَرَأْتُ عَنْهَا</a:t>
@@ -9641,11 +9712,12 @@
               <a:buNone/>
             </a:pPr>
             <a:r>
-              <a:rPr lang="en-US" sz="950" b="1" dirty="0">
+              <a:rPr lang="ar-SA" sz="950" b="1" dirty="0">
                 <a:solidFill>
                   <a:srgbClr val="FFFFFF"/>
                 </a:solidFill>
                 <a:latin typeface="Calibri" pitchFamily="34" charset="0"/>
+                <a:ea typeface="Amiri" pitchFamily="2" charset="-78"/>
                 <a:cs typeface="Amiri" pitchFamily="2" charset="-78"/>
               </a:rPr>
               <a:t>دُونَ أَنْ يُخْبِرَنَا</a:t>
@@ -9706,11 +9778,12 @@
               <a:buNone/>
             </a:pPr>
             <a:r>
-              <a:rPr lang="en-US" sz="950" b="1" dirty="0">
+              <a:rPr lang="ar-SA" sz="950" b="1" dirty="0">
                 <a:solidFill>
                   <a:srgbClr val="FFFFFF"/>
                 </a:solidFill>
                 <a:latin typeface="Calibri" pitchFamily="34" charset="0"/>
+                <a:ea typeface="Amiri" pitchFamily="2" charset="-78"/>
                 <a:cs typeface="Amiri" pitchFamily="2" charset="-78"/>
               </a:rPr>
               <a:t>لَوْ لَمْ أَحْتَفِظْ … لَبَقِينَا</a:t>
@@ -9844,6 +9917,7 @@
                   <a:srgbClr val="D4AF37"/>
                 </a:solidFill>
                 <a:latin typeface="Amiri" pitchFamily="2" charset="-78"/>
+                <a:ea typeface="Amiri" pitchFamily="2" charset="-78"/>
                 <a:cs typeface="Amiri" pitchFamily="2" charset="-78"/>
               </a:rPr>
               <a:t>م</a:t>
@@ -10101,6 +10175,7 @@
                   <a:srgbClr val="8A6D1E"/>
                 </a:solidFill>
                 <a:latin typeface="Amiri" pitchFamily="2" charset="-78"/>
+                <a:ea typeface="Amiri" pitchFamily="2" charset="-78"/>
                 <a:cs typeface="Amiri" pitchFamily="2" charset="-78"/>
               </a:rPr>
               <a:t>ب</a:t>
@@ -10165,6 +10240,7 @@
                   <a:srgbClr val="1B3B6F"/>
                 </a:solidFill>
                 <a:latin typeface="Amiri" pitchFamily="2" charset="-78"/>
+                <a:ea typeface="Amiri" pitchFamily="2" charset="-78"/>
                 <a:cs typeface="Amiri" pitchFamily="2" charset="-78"/>
               </a:rPr>
               <a:t>ب</a:t>
@@ -10216,6 +10292,7 @@
                   <a:srgbClr val="8A6D1E"/>
                 </a:solidFill>
                 <a:latin typeface="Amiri" pitchFamily="2" charset="-78"/>
+                <a:ea typeface="Amiri" pitchFamily="2" charset="-78"/>
                 <a:cs typeface="Amiri" pitchFamily="2" charset="-78"/>
               </a:rPr>
               <a:t>نَمُوذَجُ الإِجَابَةِ</a:t>
@@ -10329,6 +10406,7 @@
                   <a:srgbClr val="1F2A37"/>
                 </a:solidFill>
                 <a:latin typeface="Amiri" pitchFamily="2" charset="-78"/>
+                <a:ea typeface="Amiri" pitchFamily="2" charset="-78"/>
                 <a:cs typeface="Amiri" pitchFamily="2" charset="-78"/>
               </a:rPr>
               <a:t>لَمْ يَعُدْ أَحَدٌ يَحْمِلُ تَذْكِرَةً وَرَقِيَّةً أَوْ خَرِيطَةً مَطْبُوعَةً؛ فَالهَاتِفُ أَصْبَحَ مَحْفَظَةً تَحْتَوِي عَلَى بِطَاقَاتِنَا وَتَذَاكِرِنَا وَوَثَائِقِنَا. فَهَلْ هٰذَا التَّحَوُّلُ نِعْمَةٌ أَمْ خَطَرٌ؟</a:t>
@@ -10348,6 +10426,7 @@
                   <a:srgbClr val="1F2A37"/>
                 </a:solidFill>
                 <a:latin typeface="Amiri" pitchFamily="2" charset="-78"/>
+                <a:ea typeface="Amiri" pitchFamily="2" charset="-78"/>
                 <a:cs typeface="Amiri" pitchFamily="2" charset="-78"/>
               </a:rPr>
               <a:t>فِي المَاضِي كَانَ المُسَافِرُ يَقِفُ سَاعَاتٍ فِي طَوَابِيرِ المَكَاتِبِ لِيَحْجِزَ تَذْكِرَةً أَوْ يُجَدِّدَ جَوَازَهُ، أَمَّا اليَوْمَ فَتُنْجَزُ هٰذِهِ المُعَامَلَاتُ فِي دَقَائِقَ، وَتُرْسَلُ الوَثَائِقُ إِلَى بَرِيدِهِ الإِلِكْتْرُونِيِّ فَوْرًا، مِمَّا يُوَفِّرُ الوَقْتَ وَالوَرَقَ مَعًا. بَلْ إِنَّ جَدِّي نَفْسَهُ جَدَّدَ جَوَازَهُ العَامَ المَاضِي دُونَ أَنْ يُغَادِرَ بَيْتَهُ.</a:t>
@@ -10367,6 +10446,7 @@
                   <a:srgbClr val="1F2A37"/>
                 </a:solidFill>
                 <a:latin typeface="Amiri" pitchFamily="2" charset="-78"/>
+                <a:ea typeface="Amiri" pitchFamily="2" charset="-78"/>
                 <a:cs typeface="Amiri" pitchFamily="2" charset="-78"/>
               </a:rPr>
               <a:t>لٰكِنَّ لِهٰذِهِ السُّهُولَةِ ثَمَنًا؛ فَقَدْ تَلَقَّى خَالِي العَامَ المَاضِي رِسَالَةً تَبْدُو رَسْمِيَّةً تَطْلُبُ مِنْهُ أَنْ يُسَجِّلَ بَيَانَاتِهِ البَنْكِيَّةَ لِتَأْكِيدِ حَجْزِ طَيَرَانٍ، وَبَعْدَ سَاعَاتٍ سُرِقَ مِنْ حِسَابِهِ مَبْلَغٌ كَبِيرٌ، وَلَمْ يَسْتَرْجِعْهُ إِلَّا بَعْدَ أَسَابِيعَ.</a:t>
@@ -10386,6 +10466,7 @@
                   <a:srgbClr val="1F2A37"/>
                 </a:solidFill>
                 <a:latin typeface="Amiri" pitchFamily="2" charset="-78"/>
+                <a:ea typeface="Amiri" pitchFamily="2" charset="-78"/>
                 <a:cs typeface="Amiri" pitchFamily="2" charset="-78"/>
               </a:rPr>
               <a:t>صَحِيحٌ أَنَّ الوَثَائِقَ الرَّقْمِيَّةَ أَسْرَعُ وَأَنْظَفُ لِلْبِيئَةِ، غَيْرَ أَنَّ حِمَايَتَهَا مَسْؤُولِيَّتُنَا جَمِيعًا. وَإِذَا تَعَلَّمْنَا كَيْفَ نَتَأَكَّدُ مِنَ المَوَاقِعِ وَنَسْتَخْدِمُ كَلِمَاتِ سِرٍّ قَوِيَّةً، فَسَنَسْتَفِيدُ مِنْ هٰذَا العَالَمِ الرَّقْمِيِّ دُونَ أَنْ نَقَعَ ضَحَايَا لَهُ.</a:t>
@@ -10484,11 +10565,12 @@
               <a:buNone/>
             </a:pPr>
             <a:r>
-              <a:rPr lang="en-US" sz="950" b="1" dirty="0">
+              <a:rPr lang="ar-SA" sz="950" b="1" dirty="0">
                 <a:solidFill>
                   <a:srgbClr val="FFFFFF"/>
                 </a:solidFill>
                 <a:latin typeface="Calibri" pitchFamily="34" charset="0"/>
+                <a:ea typeface="Amiri" pitchFamily="2" charset="-78"/>
                 <a:cs typeface="Amiri" pitchFamily="2" charset="-78"/>
               </a:rPr>
               <a:t>لَمْ يَعُدْ أَحَدٌ</a:t>
@@ -10549,11 +10631,12 @@
               <a:buNone/>
             </a:pPr>
             <a:r>
-              <a:rPr lang="en-US" sz="950" b="1" dirty="0">
+              <a:rPr lang="ar-SA" sz="950" b="1" dirty="0">
                 <a:solidFill>
                   <a:srgbClr val="FFFFFF"/>
                 </a:solidFill>
                 <a:latin typeface="Calibri" pitchFamily="34" charset="0"/>
+                <a:ea typeface="Amiri" pitchFamily="2" charset="-78"/>
                 <a:cs typeface="Amiri" pitchFamily="2" charset="-78"/>
               </a:rPr>
               <a:t>أَمَّا اليَوْمَ فَتُنْجَزُ</a:t>
@@ -10614,11 +10697,12 @@
               <a:buNone/>
             </a:pPr>
             <a:r>
-              <a:rPr lang="en-US" sz="950" b="1" dirty="0">
+              <a:rPr lang="ar-SA" sz="950" b="1" dirty="0">
                 <a:solidFill>
                   <a:srgbClr val="FFFFFF"/>
                 </a:solidFill>
                 <a:latin typeface="Calibri" pitchFamily="34" charset="0"/>
+                <a:ea typeface="Amiri" pitchFamily="2" charset="-78"/>
                 <a:cs typeface="Amiri" pitchFamily="2" charset="-78"/>
               </a:rPr>
               <a:t>سُرِقَ مِنْ حِسَابِهِ</a:t>
@@ -10679,11 +10763,12 @@
               <a:buNone/>
             </a:pPr>
             <a:r>
-              <a:rPr lang="en-US" sz="950" b="1" dirty="0">
+              <a:rPr lang="ar-SA" sz="950" b="1" dirty="0">
                 <a:solidFill>
                   <a:srgbClr val="FFFFFF"/>
                 </a:solidFill>
                 <a:latin typeface="Calibri" pitchFamily="34" charset="0"/>
+                <a:ea typeface="Amiri" pitchFamily="2" charset="-78"/>
                 <a:cs typeface="Amiri" pitchFamily="2" charset="-78"/>
               </a:rPr>
               <a:t>إِذَا تَعَلَّمْنَا … فَسَنَسْتَفِيدُ</a:t>
@@ -10817,6 +10902,7 @@
                   <a:srgbClr val="D4AF37"/>
                 </a:solidFill>
                 <a:latin typeface="Amiri" pitchFamily="2" charset="-78"/>
+                <a:ea typeface="Amiri" pitchFamily="2" charset="-78"/>
                 <a:cs typeface="Amiri" pitchFamily="2" charset="-78"/>
               </a:rPr>
               <a:t>م</a:t>
@@ -11137,6 +11223,7 @@
                   <a:srgbClr val="8A6D1E"/>
                 </a:solidFill>
                 <a:latin typeface="Amiri" pitchFamily="2" charset="-78"/>
+                <a:ea typeface="Amiri" pitchFamily="2" charset="-78"/>
                 <a:cs typeface="Amiri" pitchFamily="2" charset="-78"/>
               </a:rPr>
               <a:t>قَيِّمْ عَمَلَكَ</a:t>
@@ -12381,6 +12468,7 @@
                   <a:srgbClr val="FFFFFF"/>
                 </a:solidFill>
                 <a:latin typeface="Amiri" pitchFamily="2" charset="-78"/>
+                <a:ea typeface="Amiri" pitchFamily="2" charset="-78"/>
                 <a:cs typeface="Amiri" pitchFamily="2" charset="-78"/>
               </a:rPr>
               <a:t>أَحْسَنْتُمْ! إِلَى اللِّقَاءِ</a:t>
@@ -12533,6 +12621,7 @@
                   <a:srgbClr val="D4AF37"/>
                 </a:solidFill>
                 <a:latin typeface="Amiri" pitchFamily="2" charset="-78"/>
+                <a:ea typeface="Amiri" pitchFamily="2" charset="-78"/>
                 <a:cs typeface="Amiri" pitchFamily="2" charset="-78"/>
               </a:rPr>
               <a:t>وَرْشَةُ التَّدْرِيبِ</a:t>
@@ -12666,6 +12755,7 @@
                   <a:srgbClr val="D4AF37"/>
                 </a:solidFill>
                 <a:latin typeface="Amiri" pitchFamily="2" charset="-78"/>
+                <a:ea typeface="Amiri" pitchFamily="2" charset="-78"/>
                 <a:cs typeface="Amiri" pitchFamily="2" charset="-78"/>
               </a:rPr>
               <a:t>م</a:t>
@@ -12986,6 +13076,7 @@
                   <a:srgbClr val="8A6D1E"/>
                 </a:solidFill>
                 <a:latin typeface="Amiri" pitchFamily="2" charset="-78"/>
+                <a:ea typeface="Amiri" pitchFamily="2" charset="-78"/>
                 <a:cs typeface="Amiri" pitchFamily="2" charset="-78"/>
               </a:rPr>
               <a:t>آدَابُ الصَّفِّ</a:t>
@@ -14517,6 +14608,7 @@
                   <a:srgbClr val="D4AF37"/>
                 </a:solidFill>
                 <a:latin typeface="Amiri" pitchFamily="2" charset="-78"/>
+                <a:ea typeface="Amiri" pitchFamily="2" charset="-78"/>
                 <a:cs typeface="Amiri" pitchFamily="2" charset="-78"/>
               </a:rPr>
               <a:t>م</a:t>
@@ -14837,6 +14929,7 @@
                   <a:srgbClr val="8A6D1E"/>
                 </a:solidFill>
                 <a:latin typeface="Amiri" pitchFamily="2" charset="-78"/>
+                <a:ea typeface="Amiri" pitchFamily="2" charset="-78"/>
                 <a:cs typeface="Amiri" pitchFamily="2" charset="-78"/>
               </a:rPr>
               <a:t>خَرِيطَةُ الوَرْشَةِ</a:t>
@@ -15151,6 +15244,7 @@
                   <a:srgbClr val="1B3B6F"/>
                 </a:solidFill>
                 <a:latin typeface="Amiri" pitchFamily="2" charset="-78"/>
+                <a:ea typeface="Amiri" pitchFamily="2" charset="-78"/>
                 <a:cs typeface="Amiri" pitchFamily="2" charset="-78"/>
               </a:rPr>
               <a:t>كَيْفَ</a:t>
@@ -15427,6 +15521,7 @@
                   <a:srgbClr val="1E6B52"/>
                 </a:solidFill>
                 <a:latin typeface="Amiri" pitchFamily="2" charset="-78"/>
+                <a:ea typeface="Amiri" pitchFamily="2" charset="-78"/>
                 <a:cs typeface="Amiri" pitchFamily="2" charset="-78"/>
               </a:rPr>
               <a:t>الاسْتِمَارَةُ</a:t>
@@ -15703,6 +15798,7 @@
                   <a:srgbClr val="1E6B52"/>
                 </a:solidFill>
                 <a:latin typeface="Amiri" pitchFamily="2" charset="-78"/>
+                <a:ea typeface="Amiri" pitchFamily="2" charset="-78"/>
                 <a:cs typeface="Amiri" pitchFamily="2" charset="-78"/>
               </a:rPr>
               <a:t>الرِّسَالَةُ</a:t>
@@ -15979,6 +16075,7 @@
                   <a:srgbClr val="1E6B52"/>
                 </a:solidFill>
                 <a:latin typeface="Amiri" pitchFamily="2" charset="-78"/>
+                <a:ea typeface="Amiri" pitchFamily="2" charset="-78"/>
                 <a:cs typeface="Amiri" pitchFamily="2" charset="-78"/>
               </a:rPr>
               <a:t>المَقَالُ</a:t>
@@ -16255,6 +16352,7 @@
                   <a:srgbClr val="8A6D1E"/>
                 </a:solidFill>
                 <a:latin typeface="Amiri" pitchFamily="2" charset="-78"/>
+                <a:ea typeface="Amiri" pitchFamily="2" charset="-78"/>
                 <a:cs typeface="Amiri" pitchFamily="2" charset="-78"/>
               </a:rPr>
               <a:t>قَيِّمْ</a:t>
@@ -16498,6 +16596,7 @@
                   <a:srgbClr val="D4AF37"/>
                 </a:solidFill>
                 <a:latin typeface="Amiri" pitchFamily="2" charset="-78"/>
+                <a:ea typeface="Amiri" pitchFamily="2" charset="-78"/>
                 <a:cs typeface="Amiri" pitchFamily="2" charset="-78"/>
               </a:rPr>
               <a:t>م</a:t>
@@ -16818,6 +16917,7 @@
                   <a:srgbClr val="8A6D1E"/>
                 </a:solidFill>
                 <a:latin typeface="Amiri" pitchFamily="2" charset="-78"/>
+                <a:ea typeface="Amiri" pitchFamily="2" charset="-78"/>
                 <a:cs typeface="Amiri" pitchFamily="2" charset="-78"/>
               </a:rPr>
               <a:t>امْتِحَانُ الكِتَابَةِ</a:t>
@@ -17442,6 +17542,7 @@
                   <a:srgbClr val="1B3B6F"/>
                 </a:solidFill>
                 <a:latin typeface="Amiri" pitchFamily="2" charset="-78"/>
+                <a:ea typeface="Amiri" pitchFamily="2" charset="-78"/>
                 <a:cs typeface="Amiri" pitchFamily="2" charset="-78"/>
               </a:rPr>
               <a:t>أَوَدُّ أَنْ أَحْجِزَ غُرْفَتَيْنِ</a:t>
@@ -17541,6 +17642,7 @@
                   <a:srgbClr val="1B3B6F"/>
                 </a:solidFill>
                 <a:latin typeface="Amiri" pitchFamily="2" charset="-78"/>
+                <a:ea typeface="Amiri" pitchFamily="2" charset="-78"/>
                 <a:cs typeface="Amiri" pitchFamily="2" charset="-78"/>
               </a:rPr>
               <a:t>الغُرَفُ الَّتِي تُطِلُّ عَلَى البَحْرِ</a:t>
@@ -17640,6 +17742,7 @@
                   <a:srgbClr val="1B3B6F"/>
                 </a:solidFill>
                 <a:latin typeface="Amiri" pitchFamily="2" charset="-78"/>
+                <a:ea typeface="Amiri" pitchFamily="2" charset="-78"/>
                 <a:cs typeface="Amiri" pitchFamily="2" charset="-78"/>
               </a:rPr>
               <a:t>أُرْسِلَ التَّأْكِيدُ إِلَى هَاتِفِي</a:t>
@@ -17811,6 +17914,7 @@
                   <a:srgbClr val="D4AF37"/>
                 </a:solidFill>
                 <a:latin typeface="Amiri" pitchFamily="2" charset="-78"/>
+                <a:ea typeface="Amiri" pitchFamily="2" charset="-78"/>
                 <a:cs typeface="Amiri" pitchFamily="2" charset="-78"/>
               </a:rPr>
               <a:t>م</a:t>
@@ -18131,6 +18235,7 @@
                   <a:srgbClr val="8A6D1E"/>
                 </a:solidFill>
                 <a:latin typeface="Amiri" pitchFamily="2" charset="-78"/>
+                <a:ea typeface="Amiri" pitchFamily="2" charset="-78"/>
                 <a:cs typeface="Amiri" pitchFamily="2" charset="-78"/>
               </a:rPr>
               <a:t>بِطَاقَةُ تَسْجِيلِ النُّزَلَاءِ</a:t>
@@ -18487,6 +18592,7 @@
                   <a:srgbClr val="1B3B6F"/>
                 </a:solidFill>
                 <a:latin typeface="Amiri" pitchFamily="2" charset="-78"/>
+                <a:ea typeface="Amiri" pitchFamily="2" charset="-78"/>
                 <a:cs typeface="Amiri" pitchFamily="2" charset="-78"/>
               </a:rPr>
               <a:t>الاسْمُ الكَامِلُ</a:t>
@@ -18731,6 +18837,7 @@
                   <a:srgbClr val="1B3B6F"/>
                 </a:solidFill>
                 <a:latin typeface="Amiri" pitchFamily="2" charset="-78"/>
+                <a:ea typeface="Amiri" pitchFamily="2" charset="-78"/>
                 <a:cs typeface="Amiri" pitchFamily="2" charset="-78"/>
               </a:rPr>
               <a:t>الجِنْسِيَّةُ</a:t>
@@ -18975,6 +19082,7 @@
                   <a:srgbClr val="1B3B6F"/>
                 </a:solidFill>
                 <a:latin typeface="Amiri" pitchFamily="2" charset="-78"/>
+                <a:ea typeface="Amiri" pitchFamily="2" charset="-78"/>
                 <a:cs typeface="Amiri" pitchFamily="2" charset="-78"/>
               </a:rPr>
               <a:t>تَارِيخُ المِيلَادِ</a:t>
@@ -19219,6 +19327,7 @@
                   <a:srgbClr val="1B3B6F"/>
                 </a:solidFill>
                 <a:latin typeface="Amiri" pitchFamily="2" charset="-78"/>
+                <a:ea typeface="Amiri" pitchFamily="2" charset="-78"/>
                 <a:cs typeface="Amiri" pitchFamily="2" charset="-78"/>
               </a:rPr>
               <a:t>رَقْمُ جَوَازِ السَّفَرِ</a:t>
@@ -19463,6 +19572,7 @@
                   <a:srgbClr val="1B3B6F"/>
                 </a:solidFill>
                 <a:latin typeface="Amiri" pitchFamily="2" charset="-78"/>
+                <a:ea typeface="Amiri" pitchFamily="2" charset="-78"/>
                 <a:cs typeface="Amiri" pitchFamily="2" charset="-78"/>
               </a:rPr>
               <a:t>تَارِيخُ الوُصُولِ وَالمُغَادَرَةِ</a:t>
@@ -19707,6 +19817,7 @@
                   <a:srgbClr val="1B3B6F"/>
                 </a:solidFill>
                 <a:latin typeface="Amiri" pitchFamily="2" charset="-78"/>
+                <a:ea typeface="Amiri" pitchFamily="2" charset="-78"/>
                 <a:cs typeface="Amiri" pitchFamily="2" charset="-78"/>
               </a:rPr>
               <a:t>نَوْعُ الغُرْفَةِ</a:t>
@@ -19951,6 +20062,7 @@
                   <a:srgbClr val="1B3B6F"/>
                 </a:solidFill>
                 <a:latin typeface="Amiri" pitchFamily="2" charset="-78"/>
+                <a:ea typeface="Amiri" pitchFamily="2" charset="-78"/>
                 <a:cs typeface="Amiri" pitchFamily="2" charset="-78"/>
               </a:rPr>
               <a:t>طَلَبٌ خَاصٌّ</a:t>
@@ -20130,6 +20242,7 @@
                   <a:srgbClr val="1B3B6F"/>
                 </a:solidFill>
                 <a:latin typeface="Amiri" pitchFamily="2" charset="-78"/>
+                <a:ea typeface="Amiri" pitchFamily="2" charset="-78"/>
                 <a:cs typeface="Amiri" pitchFamily="2" charset="-78"/>
               </a:rPr>
               <a:t>جُمْلَةٌ: كَيْفَ عَرَفْتَ الفُنْدُقَ؟</a:t>
@@ -20339,6 +20452,7 @@
                   <a:srgbClr val="D4AF37"/>
                 </a:solidFill>
                 <a:latin typeface="Amiri" pitchFamily="2" charset="-78"/>
+                <a:ea typeface="Amiri" pitchFamily="2" charset="-78"/>
                 <a:cs typeface="Amiri" pitchFamily="2" charset="-78"/>
               </a:rPr>
               <a:t>م</a:t>
@@ -20659,6 +20773,7 @@
                   <a:srgbClr val="8A6D1E"/>
                 </a:solidFill>
                 <a:latin typeface="Amiri" pitchFamily="2" charset="-78"/>
+                <a:ea typeface="Amiri" pitchFamily="2" charset="-78"/>
                 <a:cs typeface="Amiri" pitchFamily="2" charset="-78"/>
               </a:rPr>
               <a:t>نَمُوذَجُ الإِجَابَةِ</a:t>
@@ -20977,6 +21092,7 @@
                   <a:srgbClr val="1B3B6F"/>
                 </a:solidFill>
                 <a:latin typeface="Amiri" pitchFamily="2" charset="-78"/>
+                <a:ea typeface="Amiri" pitchFamily="2" charset="-78"/>
                 <a:cs typeface="Amiri" pitchFamily="2" charset="-78"/>
               </a:rPr>
               <a:t>يُوسُفُ أَحْمَدُ</a:t>
@@ -21015,6 +21131,7 @@
                   <a:srgbClr val="1B3B6F"/>
                 </a:solidFill>
                 <a:latin typeface="Amiri" pitchFamily="2" charset="-78"/>
+                <a:ea typeface="Amiri" pitchFamily="2" charset="-78"/>
                 <a:cs typeface="Amiri" pitchFamily="2" charset="-78"/>
               </a:rPr>
               <a:t>الاسْمُ الكَامِلُ</a:t>
@@ -21156,6 +21273,7 @@
                   <a:srgbClr val="1B3B6F"/>
                 </a:solidFill>
                 <a:latin typeface="Amiri" pitchFamily="2" charset="-78"/>
+                <a:ea typeface="Amiri" pitchFamily="2" charset="-78"/>
                 <a:cs typeface="Amiri" pitchFamily="2" charset="-78"/>
               </a:rPr>
               <a:t>بَرِيطَانِيٌّ</a:t>
@@ -21194,6 +21312,7 @@
                   <a:srgbClr val="1B3B6F"/>
                 </a:solidFill>
                 <a:latin typeface="Amiri" pitchFamily="2" charset="-78"/>
+                <a:ea typeface="Amiri" pitchFamily="2" charset="-78"/>
                 <a:cs typeface="Amiri" pitchFamily="2" charset="-78"/>
               </a:rPr>
               <a:t>الجِنْسِيَّةُ</a:t>
@@ -21335,6 +21454,7 @@
                   <a:srgbClr val="1B3B6F"/>
                 </a:solidFill>
                 <a:latin typeface="Amiri" pitchFamily="2" charset="-78"/>
+                <a:ea typeface="Amiri" pitchFamily="2" charset="-78"/>
                 <a:cs typeface="Amiri" pitchFamily="2" charset="-78"/>
               </a:rPr>
               <a:t>٣ مَارِس ٢٠٠٩</a:t>
@@ -21373,6 +21493,7 @@
                   <a:srgbClr val="1B3B6F"/>
                 </a:solidFill>
                 <a:latin typeface="Amiri" pitchFamily="2" charset="-78"/>
+                <a:ea typeface="Amiri" pitchFamily="2" charset="-78"/>
                 <a:cs typeface="Amiri" pitchFamily="2" charset="-78"/>
               </a:rPr>
               <a:t>تَارِيخُ المِيلَادِ</a:t>
@@ -21514,6 +21635,7 @@
                   <a:srgbClr val="1B3B6F"/>
                 </a:solidFill>
                 <a:latin typeface="Amiri" pitchFamily="2" charset="-78"/>
+                <a:ea typeface="Amiri" pitchFamily="2" charset="-78"/>
                 <a:cs typeface="Amiri" pitchFamily="2" charset="-78"/>
               </a:rPr>
               <a:t>٥٤٨٢٩١٧٣٦</a:t>
@@ -21552,6 +21674,7 @@
                   <a:srgbClr val="1B3B6F"/>
                 </a:solidFill>
                 <a:latin typeface="Amiri" pitchFamily="2" charset="-78"/>
+                <a:ea typeface="Amiri" pitchFamily="2" charset="-78"/>
                 <a:cs typeface="Amiri" pitchFamily="2" charset="-78"/>
               </a:rPr>
               <a:t>رَقْمُ جَوَازِ السَّفَرِ</a:t>
@@ -21693,6 +21816,7 @@
                   <a:srgbClr val="1B3B6F"/>
                 </a:solidFill>
                 <a:latin typeface="Amiri" pitchFamily="2" charset="-78"/>
+                <a:ea typeface="Amiri" pitchFamily="2" charset="-78"/>
                 <a:cs typeface="Amiri" pitchFamily="2" charset="-78"/>
               </a:rPr>
               <a:t>مِنْ ١٠ إِلَى ١٥ يُولْيُو</a:t>
@@ -21731,6 +21855,7 @@
                   <a:srgbClr val="1B3B6F"/>
                 </a:solidFill>
                 <a:latin typeface="Amiri" pitchFamily="2" charset="-78"/>
+                <a:ea typeface="Amiri" pitchFamily="2" charset="-78"/>
                 <a:cs typeface="Amiri" pitchFamily="2" charset="-78"/>
               </a:rPr>
               <a:t>تَارِيخُ الوُصُولِ وَالمُغَادَرَةِ</a:t>
@@ -21872,6 +21997,7 @@
                   <a:srgbClr val="1B3B6F"/>
                 </a:solidFill>
                 <a:latin typeface="Amiri" pitchFamily="2" charset="-78"/>
+                <a:ea typeface="Amiri" pitchFamily="2" charset="-78"/>
                 <a:cs typeface="Amiri" pitchFamily="2" charset="-78"/>
               </a:rPr>
               <a:t>غُرْفَةٌ مُزْدَوَجَةٌ</a:t>
@@ -21910,6 +22036,7 @@
                   <a:srgbClr val="1B3B6F"/>
                 </a:solidFill>
                 <a:latin typeface="Amiri" pitchFamily="2" charset="-78"/>
+                <a:ea typeface="Amiri" pitchFamily="2" charset="-78"/>
                 <a:cs typeface="Amiri" pitchFamily="2" charset="-78"/>
               </a:rPr>
               <a:t>نَوْعُ الغُرْفَةِ</a:t>
@@ -22051,6 +22178,7 @@
                   <a:srgbClr val="1B3B6F"/>
                 </a:solidFill>
                 <a:latin typeface="Amiri" pitchFamily="2" charset="-78"/>
+                <a:ea typeface="Amiri" pitchFamily="2" charset="-78"/>
                 <a:cs typeface="Amiri" pitchFamily="2" charset="-78"/>
               </a:rPr>
               <a:t>غُرْفَةٌ هَادِئَةٌ بَعِيدَةٌ عَنِ المِصْعَدِ</a:t>
@@ -22089,6 +22217,7 @@
                   <a:srgbClr val="1B3B6F"/>
                 </a:solidFill>
                 <a:latin typeface="Amiri" pitchFamily="2" charset="-78"/>
+                <a:ea typeface="Amiri" pitchFamily="2" charset="-78"/>
                 <a:cs typeface="Amiri" pitchFamily="2" charset="-78"/>
               </a:rPr>
               <a:t>طَلَبٌ خَاصٌّ</a:t>
@@ -22230,6 +22359,7 @@
                   <a:srgbClr val="1B3B6F"/>
                 </a:solidFill>
                 <a:latin typeface="Amiri" pitchFamily="2" charset="-78"/>
+                <a:ea typeface="Amiri" pitchFamily="2" charset="-78"/>
                 <a:cs typeface="Amiri" pitchFamily="2" charset="-78"/>
               </a:rPr>
               <a:t>قَرَأْتُ عَنْهُ تَعْلِيقَاتٍ مُمْتَازَةً عَلَى المَوْقِعِ الَّذِي حَجَزْتُ مِنْهُ.</a:t>
@@ -22268,6 +22398,7 @@
                   <a:srgbClr val="1B3B6F"/>
                 </a:solidFill>
                 <a:latin typeface="Amiri" pitchFamily="2" charset="-78"/>
+                <a:ea typeface="Amiri" pitchFamily="2" charset="-78"/>
                 <a:cs typeface="Amiri" pitchFamily="2" charset="-78"/>
               </a:rPr>
               <a:t>جُمْلَةٌ: كَيْفَ عَرَفْتَ الفُنْدُقَ؟</a:t>
@@ -22477,6 +22608,7 @@
                   <a:srgbClr val="D4AF37"/>
                 </a:solidFill>
                 <a:latin typeface="Amiri" pitchFamily="2" charset="-78"/>
+                <a:ea typeface="Amiri" pitchFamily="2" charset="-78"/>
                 <a:cs typeface="Amiri" pitchFamily="2" charset="-78"/>
               </a:rPr>
               <a:t>م</a:t>
@@ -22797,6 +22929,7 @@
                   <a:srgbClr val="8A6D1E"/>
                 </a:solidFill>
                 <a:latin typeface="Amiri" pitchFamily="2" charset="-78"/>
+                <a:ea typeface="Amiri" pitchFamily="2" charset="-78"/>
                 <a:cs typeface="Amiri" pitchFamily="2" charset="-78"/>
               </a:rPr>
               <a:t>رِسَالَةُ حَجْزٍ إِلَى فُنْدُقٍ</a:t>
@@ -23272,6 +23405,7 @@
                   <a:srgbClr val="1B3B6F"/>
                 </a:solidFill>
                 <a:latin typeface="Amiri" pitchFamily="2" charset="-78"/>
+                <a:ea typeface="Amiri" pitchFamily="2" charset="-78"/>
                 <a:cs typeface="Amiri" pitchFamily="2" charset="-78"/>
               </a:rPr>
               <a:t>أُرِيدُ أَنْ أَحْجِزَ … لِأَرْبَعَةِ أَشْخَاصٍ</a:t>
@@ -23348,6 +23482,7 @@
                   <a:srgbClr val="1B3B6F"/>
                 </a:solidFill>
                 <a:latin typeface="Amiri" pitchFamily="2" charset="-78"/>
+                <a:ea typeface="Amiri" pitchFamily="2" charset="-78"/>
                 <a:cs typeface="Amiri" pitchFamily="2" charset="-78"/>
               </a:rPr>
               <a:t>سَنَصِلُ يَوْمَ … وَسَنُقِيمُ … لَيَالٍ</a:t>
@@ -23424,6 +23559,7 @@
                   <a:srgbClr val="1B3B6F"/>
                 </a:solidFill>
                 <a:latin typeface="Amiri" pitchFamily="2" charset="-78"/>
+                <a:ea typeface="Amiri" pitchFamily="2" charset="-78"/>
                 <a:cs typeface="Amiri" pitchFamily="2" charset="-78"/>
               </a:rPr>
               <a:t>فِي السَّنَةِ المَاضِيَةِ أَقَمْنَا …</a:t>
@@ -23500,6 +23636,7 @@
                   <a:srgbClr val="1B3B6F"/>
                 </a:solidFill>
                 <a:latin typeface="Amiri" pitchFamily="2" charset="-78"/>
+                <a:ea typeface="Amiri" pitchFamily="2" charset="-78"/>
                 <a:cs typeface="Amiri" pitchFamily="2" charset="-78"/>
               </a:rPr>
               <a:t>هَلْ عِنْدَكُمْ …؟ وَكَمْ سِعْرُ …؟</a:t>
@@ -23671,6 +23808,7 @@
                   <a:srgbClr val="D4AF37"/>
                 </a:solidFill>
                 <a:latin typeface="Amiri" pitchFamily="2" charset="-78"/>
+                <a:ea typeface="Amiri" pitchFamily="2" charset="-78"/>
                 <a:cs typeface="Amiri" pitchFamily="2" charset="-78"/>
               </a:rPr>
               <a:t>م</a:t>
@@ -23991,6 +24129,7 @@
                   <a:srgbClr val="8A6D1E"/>
                 </a:solidFill>
                 <a:latin typeface="Amiri" pitchFamily="2" charset="-78"/>
+                <a:ea typeface="Amiri" pitchFamily="2" charset="-78"/>
                 <a:cs typeface="Amiri" pitchFamily="2" charset="-78"/>
               </a:rPr>
               <a:t>نَصُّ السُّؤَالِ</a:t>
@@ -24271,6 +24410,7 @@
                   <a:srgbClr val="1B3B6F"/>
                 </a:solidFill>
                 <a:latin typeface="Amiri" pitchFamily="2" charset="-78"/>
+                <a:ea typeface="Amiri" pitchFamily="2" charset="-78"/>
                 <a:cs typeface="Amiri" pitchFamily="2" charset="-78"/>
               </a:rPr>
               <a:t>تُرِيدُ أَنْ تَحْجِزَ فُنْدُقًا لِعُطْلَةِ أُسْرَتِكَ. اكْتُبْ رِسَالَةً إِلَى الفُنْدُقِ (٨٠–٩٠ كَلِمَةً).</a:t>
@@ -24412,6 +24552,7 @@
                   <a:srgbClr val="1B3B6F"/>
                 </a:solidFill>
                 <a:latin typeface="Amiri" pitchFamily="2" charset="-78"/>
+                <a:ea typeface="Amiri" pitchFamily="2" charset="-78"/>
                 <a:cs typeface="Amiri" pitchFamily="2" charset="-78"/>
               </a:rPr>
               <a:t>مَنْ أَنْتَ؟ وَكَمْ شَخْصًا؟</a:t>
@@ -24553,6 +24694,7 @@
                   <a:srgbClr val="1B3B6F"/>
                 </a:solidFill>
                 <a:latin typeface="Amiri" pitchFamily="2" charset="-78"/>
+                <a:ea typeface="Amiri" pitchFamily="2" charset="-78"/>
                 <a:cs typeface="Amiri" pitchFamily="2" charset="-78"/>
               </a:rPr>
               <a:t>مَا التَّوَارِيخُ؟ وَأَيُّ غُرْفَةٍ تُرِيدُ؟</a:t>
@@ -24694,6 +24836,7 @@
                   <a:srgbClr val="1B3B6F"/>
                 </a:solidFill>
                 <a:latin typeface="Amiri" pitchFamily="2" charset="-78"/>
+                <a:ea typeface="Amiri" pitchFamily="2" charset="-78"/>
                 <a:cs typeface="Amiri" pitchFamily="2" charset="-78"/>
               </a:rPr>
               <a:t>لِمَاذَا اخْتَرْتَ هٰذَا الفُنْدُقَ؟</a:t>
@@ -24835,6 +24978,7 @@
                   <a:srgbClr val="1B3B6F"/>
                 </a:solidFill>
                 <a:latin typeface="Amiri" pitchFamily="2" charset="-78"/>
+                <a:ea typeface="Amiri" pitchFamily="2" charset="-78"/>
                 <a:cs typeface="Amiri" pitchFamily="2" charset="-78"/>
               </a:rPr>
               <a:t>اسْأَلْ سُؤَالَيْنِ عَنِ الفُنْدُقِ أَوِ الخِدْمَاتِ.</a:t>
@@ -25044,6 +25188,7 @@
                   <a:srgbClr val="D4AF37"/>
                 </a:solidFill>
                 <a:latin typeface="Amiri" pitchFamily="2" charset="-78"/>
+                <a:ea typeface="Amiri" pitchFamily="2" charset="-78"/>
                 <a:cs typeface="Amiri" pitchFamily="2" charset="-78"/>
               </a:rPr>
               <a:t>م</a:t>
@@ -25364,6 +25509,7 @@
                   <a:srgbClr val="8A6D1E"/>
                 </a:solidFill>
                 <a:latin typeface="Amiri" pitchFamily="2" charset="-78"/>
+                <a:ea typeface="Amiri" pitchFamily="2" charset="-78"/>
                 <a:cs typeface="Amiri" pitchFamily="2" charset="-78"/>
               </a:rPr>
               <a:t>قَوَالِبُ الكِتَابَةِ</a:t>
@@ -25644,6 +25790,7 @@
                   <a:srgbClr val="1B3B6F"/>
                 </a:solidFill>
                 <a:latin typeface="Amiri" pitchFamily="2" charset="-78"/>
+                <a:ea typeface="Amiri" pitchFamily="2" charset="-78"/>
                 <a:cs typeface="Amiri" pitchFamily="2" charset="-78"/>
               </a:rPr>
               <a:t>السَّلَامُ عَلَيْكُمْ،</a:t>
@@ -25850,6 +25997,7 @@
                   <a:srgbClr val="1B3B6F"/>
                 </a:solidFill>
                 <a:latin typeface="Amiri" pitchFamily="2" charset="-78"/>
+                <a:ea typeface="Amiri" pitchFamily="2" charset="-78"/>
                 <a:cs typeface="Amiri" pitchFamily="2" charset="-78"/>
               </a:rPr>
               <a:t>أُرِيدُ أَنْ أَحْجِزَ غُرْفَةً لِي وَلِأُسْرَتِي. نَحْنُ ______ أَشْخَاصٍ.</a:t>
@@ -26056,6 +26204,7 @@
                   <a:srgbClr val="1B3B6F"/>
                 </a:solidFill>
                 <a:latin typeface="Amiri" pitchFamily="2" charset="-78"/>
+                <a:ea typeface="Amiri" pitchFamily="2" charset="-78"/>
                 <a:cs typeface="Amiri" pitchFamily="2" charset="-78"/>
               </a:rPr>
               <a:t>سَنَصِلُ يَوْمَ ______ ، وَسَنُقِيمُ ______ لَيَالٍ. نُرِيدُ ______ .</a:t>
@@ -26262,6 +26411,7 @@
                   <a:srgbClr val="1B3B6F"/>
                 </a:solidFill>
                 <a:latin typeface="Amiri" pitchFamily="2" charset="-78"/>
+                <a:ea typeface="Amiri" pitchFamily="2" charset="-78"/>
                 <a:cs typeface="Amiri" pitchFamily="2" charset="-78"/>
               </a:rPr>
               <a:t>فِي السَّنَةِ المَاضِيَةِ ______ ، وَكَانَتِ الخِدْمَةُ ______ .</a:t>
@@ -26468,6 +26618,7 @@
                   <a:srgbClr val="1B3B6F"/>
                 </a:solidFill>
                 <a:latin typeface="Amiri" pitchFamily="2" charset="-78"/>
+                <a:ea typeface="Amiri" pitchFamily="2" charset="-78"/>
                 <a:cs typeface="Amiri" pitchFamily="2" charset="-78"/>
               </a:rPr>
               <a:t>هَلْ عِنْدَكُمْ ______ ؟ وَكَمْ سِعْرُ ______ ؟</a:t>
@@ -26674,6 +26825,7 @@
                   <a:srgbClr val="1B3B6F"/>
                 </a:solidFill>
                 <a:latin typeface="Amiri" pitchFamily="2" charset="-78"/>
+                <a:ea typeface="Amiri" pitchFamily="2" charset="-78"/>
                 <a:cs typeface="Amiri" pitchFamily="2" charset="-78"/>
               </a:rPr>
               <a:t>مَعَ الشُّكْرِ، ______</a:t>
@@ -26913,13 +27065,9 @@
     <a:fontScheme name="Office">
       <a:majorFont>
         <a:latin typeface="Calibri Light" panose="020F0302020204030204"/>
-        <a:ea typeface=""/>
-        <a:cs typeface=""/>
-        <a:font script="Jpan" typeface="游ゴシック Light"/>
-        <a:font script="Hang" typeface="맑은 고딕"/>
-        <a:font script="Hans" typeface="等线 Light"/>
-        <a:font script="Hant" typeface="新細明體"/>
-        <a:font script="Arab" typeface="Times New Roman"/>
+        <a:ea typeface="Amiri" pitchFamily="2" charset="-78"/>
+        <a:cs typeface="Amiri" pitchFamily="2" charset="-78"/>
+        <a:font script="Arab" typeface="Amiri"/>
         <a:font script="Hebr" typeface="Times New Roman"/>
         <a:font script="Thai" typeface="Angsana New"/>
         <a:font script="Ethi" typeface="Nyala"/>
@@ -26965,13 +27113,9 @@
       </a:majorFont>
       <a:minorFont>
         <a:latin typeface="Calibri" panose="020F0502020204030204"/>
-        <a:ea typeface=""/>
-        <a:cs typeface=""/>
-        <a:font script="Jpan" typeface="游ゴシック"/>
-        <a:font script="Hang" typeface="맑은 고딕"/>
-        <a:font script="Hans" typeface="等线"/>
-        <a:font script="Hant" typeface="新細明體"/>
-        <a:font script="Arab" typeface="Arial"/>
+        <a:ea typeface="Amiri" pitchFamily="2" charset="-78"/>
+        <a:cs typeface="Amiri" pitchFamily="2" charset="-78"/>
+        <a:font script="Arab" typeface="Amiri"/>
         <a:font script="Hebr" typeface="Arial"/>
         <a:font script="Thai" typeface="Cordia New"/>
         <a:font script="Ethi" typeface="Nyala"/>

--- a/Topic_C/Exam_Practice/TC-L07_Writing_Workshop_Documents_Texts_Digital_Information.pptx
+++ b/Topic_C/Exam_Practice/TC-L07_Writing_Workshop_Documents_Texts_Digital_Information.pptx
@@ -3848,7 +3848,7 @@
                 <a:solidFill>
                   <a:srgbClr val="FFFFFF"/>
                 </a:solidFill>
-                <a:latin typeface="Calibri" pitchFamily="34" charset="0"/>
+                <a:latin typeface="Amiri" pitchFamily="2" charset="-78"/>
                 <a:ea typeface="Amiri" pitchFamily="2" charset="-78"/>
                 <a:cs typeface="Amiri" pitchFamily="2" charset="-78"/>
               </a:rPr>
@@ -3914,7 +3914,7 @@
                 <a:solidFill>
                   <a:srgbClr val="FFFFFF"/>
                 </a:solidFill>
-                <a:latin typeface="Calibri" pitchFamily="34" charset="0"/>
+                <a:latin typeface="Amiri" pitchFamily="2" charset="-78"/>
                 <a:ea typeface="Amiri" pitchFamily="2" charset="-78"/>
                 <a:cs typeface="Amiri" pitchFamily="2" charset="-78"/>
               </a:rPr>
@@ -3980,7 +3980,7 @@
                 <a:solidFill>
                   <a:srgbClr val="FFFFFF"/>
                 </a:solidFill>
-                <a:latin typeface="Calibri" pitchFamily="34" charset="0"/>
+                <a:latin typeface="Amiri" pitchFamily="2" charset="-78"/>
                 <a:ea typeface="Amiri" pitchFamily="2" charset="-78"/>
                 <a:cs typeface="Amiri" pitchFamily="2" charset="-78"/>
               </a:rPr>
@@ -4046,7 +4046,7 @@
                 <a:solidFill>
                   <a:srgbClr val="FFFFFF"/>
                 </a:solidFill>
-                <a:latin typeface="Calibri" pitchFamily="34" charset="0"/>
+                <a:latin typeface="Amiri" pitchFamily="2" charset="-78"/>
                 <a:ea typeface="Amiri" pitchFamily="2" charset="-78"/>
                 <a:cs typeface="Amiri" pitchFamily="2" charset="-78"/>
               </a:rPr>
@@ -4844,7 +4844,7 @@
                 <a:solidFill>
                   <a:srgbClr val="FFFFFF"/>
                 </a:solidFill>
-                <a:latin typeface="Calibri" pitchFamily="34" charset="0"/>
+                <a:latin typeface="Amiri" pitchFamily="2" charset="-78"/>
                 <a:ea typeface="Amiri" pitchFamily="2" charset="-78"/>
                 <a:cs typeface="Amiri" pitchFamily="2" charset="-78"/>
               </a:rPr>
@@ -4910,7 +4910,7 @@
                 <a:solidFill>
                   <a:srgbClr val="FFFFFF"/>
                 </a:solidFill>
-                <a:latin typeface="Calibri" pitchFamily="34" charset="0"/>
+                <a:latin typeface="Amiri" pitchFamily="2" charset="-78"/>
                 <a:ea typeface="Amiri" pitchFamily="2" charset="-78"/>
                 <a:cs typeface="Amiri" pitchFamily="2" charset="-78"/>
               </a:rPr>
@@ -4976,7 +4976,7 @@
                 <a:solidFill>
                   <a:srgbClr val="FFFFFF"/>
                 </a:solidFill>
-                <a:latin typeface="Calibri" pitchFamily="34" charset="0"/>
+                <a:latin typeface="Amiri" pitchFamily="2" charset="-78"/>
                 <a:ea typeface="Amiri" pitchFamily="2" charset="-78"/>
                 <a:cs typeface="Amiri" pitchFamily="2" charset="-78"/>
               </a:rPr>
@@ -5042,7 +5042,7 @@
                 <a:solidFill>
                   <a:srgbClr val="FFFFFF"/>
                 </a:solidFill>
-                <a:latin typeface="Calibri" pitchFamily="34" charset="0"/>
+                <a:latin typeface="Amiri" pitchFamily="2" charset="-78"/>
                 <a:ea typeface="Amiri" pitchFamily="2" charset="-78"/>
                 <a:cs typeface="Amiri" pitchFamily="2" charset="-78"/>
               </a:rPr>
@@ -8599,7 +8599,7 @@
                 <a:solidFill>
                   <a:srgbClr val="FFFFFF"/>
                 </a:solidFill>
-                <a:latin typeface="Calibri" pitchFamily="34" charset="0"/>
+                <a:latin typeface="Amiri" pitchFamily="2" charset="-78"/>
                 <a:ea typeface="Amiri" pitchFamily="2" charset="-78"/>
                 <a:cs typeface="Amiri" pitchFamily="2" charset="-78"/>
               </a:rPr>
@@ -8665,7 +8665,7 @@
                 <a:solidFill>
                   <a:srgbClr val="FFFFFF"/>
                 </a:solidFill>
-                <a:latin typeface="Calibri" pitchFamily="34" charset="0"/>
+                <a:latin typeface="Amiri" pitchFamily="2" charset="-78"/>
                 <a:ea typeface="Amiri" pitchFamily="2" charset="-78"/>
                 <a:cs typeface="Amiri" pitchFamily="2" charset="-78"/>
               </a:rPr>
@@ -8731,7 +8731,7 @@
                 <a:solidFill>
                   <a:srgbClr val="FFFFFF"/>
                 </a:solidFill>
-                <a:latin typeface="Calibri" pitchFamily="34" charset="0"/>
+                <a:latin typeface="Amiri" pitchFamily="2" charset="-78"/>
                 <a:ea typeface="Amiri" pitchFamily="2" charset="-78"/>
                 <a:cs typeface="Amiri" pitchFamily="2" charset="-78"/>
               </a:rPr>
@@ -8797,7 +8797,7 @@
                 <a:solidFill>
                   <a:srgbClr val="FFFFFF"/>
                 </a:solidFill>
-                <a:latin typeface="Calibri" pitchFamily="34" charset="0"/>
+                <a:latin typeface="Amiri" pitchFamily="2" charset="-78"/>
                 <a:ea typeface="Amiri" pitchFamily="2" charset="-78"/>
                 <a:cs typeface="Amiri" pitchFamily="2" charset="-78"/>
               </a:rPr>
@@ -9584,7 +9584,7 @@
                 <a:solidFill>
                   <a:srgbClr val="FFFFFF"/>
                 </a:solidFill>
-                <a:latin typeface="Calibri" pitchFamily="34" charset="0"/>
+                <a:latin typeface="Amiri" pitchFamily="2" charset="-78"/>
                 <a:ea typeface="Amiri" pitchFamily="2" charset="-78"/>
                 <a:cs typeface="Amiri" pitchFamily="2" charset="-78"/>
               </a:rPr>
@@ -9650,7 +9650,7 @@
                 <a:solidFill>
                   <a:srgbClr val="FFFFFF"/>
                 </a:solidFill>
-                <a:latin typeface="Calibri" pitchFamily="34" charset="0"/>
+                <a:latin typeface="Amiri" pitchFamily="2" charset="-78"/>
                 <a:ea typeface="Amiri" pitchFamily="2" charset="-78"/>
                 <a:cs typeface="Amiri" pitchFamily="2" charset="-78"/>
               </a:rPr>
@@ -9716,7 +9716,7 @@
                 <a:solidFill>
                   <a:srgbClr val="FFFFFF"/>
                 </a:solidFill>
-                <a:latin typeface="Calibri" pitchFamily="34" charset="0"/>
+                <a:latin typeface="Amiri" pitchFamily="2" charset="-78"/>
                 <a:ea typeface="Amiri" pitchFamily="2" charset="-78"/>
                 <a:cs typeface="Amiri" pitchFamily="2" charset="-78"/>
               </a:rPr>
@@ -9782,7 +9782,7 @@
                 <a:solidFill>
                   <a:srgbClr val="FFFFFF"/>
                 </a:solidFill>
-                <a:latin typeface="Calibri" pitchFamily="34" charset="0"/>
+                <a:latin typeface="Amiri" pitchFamily="2" charset="-78"/>
                 <a:ea typeface="Amiri" pitchFamily="2" charset="-78"/>
                 <a:cs typeface="Amiri" pitchFamily="2" charset="-78"/>
               </a:rPr>
@@ -10569,7 +10569,7 @@
                 <a:solidFill>
                   <a:srgbClr val="FFFFFF"/>
                 </a:solidFill>
-                <a:latin typeface="Calibri" pitchFamily="34" charset="0"/>
+                <a:latin typeface="Amiri" pitchFamily="2" charset="-78"/>
                 <a:ea typeface="Amiri" pitchFamily="2" charset="-78"/>
                 <a:cs typeface="Amiri" pitchFamily="2" charset="-78"/>
               </a:rPr>
@@ -10635,7 +10635,7 @@
                 <a:solidFill>
                   <a:srgbClr val="FFFFFF"/>
                 </a:solidFill>
-                <a:latin typeface="Calibri" pitchFamily="34" charset="0"/>
+                <a:latin typeface="Amiri" pitchFamily="2" charset="-78"/>
                 <a:ea typeface="Amiri" pitchFamily="2" charset="-78"/>
                 <a:cs typeface="Amiri" pitchFamily="2" charset="-78"/>
               </a:rPr>
@@ -10701,7 +10701,7 @@
                 <a:solidFill>
                   <a:srgbClr val="FFFFFF"/>
                 </a:solidFill>
-                <a:latin typeface="Calibri" pitchFamily="34" charset="0"/>
+                <a:latin typeface="Amiri" pitchFamily="2" charset="-78"/>
                 <a:ea typeface="Amiri" pitchFamily="2" charset="-78"/>
                 <a:cs typeface="Amiri" pitchFamily="2" charset="-78"/>
               </a:rPr>
@@ -10767,7 +10767,7 @@
                 <a:solidFill>
                   <a:srgbClr val="FFFFFF"/>
                 </a:solidFill>
-                <a:latin typeface="Calibri" pitchFamily="34" charset="0"/>
+                <a:latin typeface="Amiri" pitchFamily="2" charset="-78"/>
                 <a:ea typeface="Amiri" pitchFamily="2" charset="-78"/>
                 <a:cs typeface="Amiri" pitchFamily="2" charset="-78"/>
               </a:rPr>
